--- a/@Materi Kuliah/Materi_Teori_Antrian/Presentasi_Teori_Antrian_Profesional_dari_HTML.pptx
+++ b/@Materi Kuliah/Materi_Teori_Antrian/Presentasi_Teori_Antrian_Profesional_dari_HTML.pptx
@@ -2,131 +2,36 @@
 <file path=ppt/presentation.xml><?xml version="1.0" encoding="utf-8"?>
 <p:presentation xmlns:p="http://schemas.openxmlformats.org/presentationml/2006/main">
   <p:sldMasterIdLst>
-    <p:sldMasterId xmlns:r="http://schemas.openxmlformats.org/officeDocument/2006/relationships" id="2147483648" r:id="R0d8c13c08fc54ac3"/>
+    <p:sldMasterId xmlns:r="http://schemas.openxmlformats.org/officeDocument/2006/relationships" id="2147483648" r:id="R9380938399cc4622"/>
   </p:sldMasterIdLst>
   <p:notesMasterIdLst>
-    <p:notesMasterId xmlns:r="http://schemas.openxmlformats.org/officeDocument/2006/relationships" r:id="R3f3eaf38253a4b93"/>
+    <p:notesMasterId xmlns:r="http://schemas.openxmlformats.org/officeDocument/2006/relationships" r:id="Rd1e723cadab74657"/>
   </p:notesMasterIdLst>
   <p:sldIdLst>
-    <p:sldId xmlns:r="http://schemas.openxmlformats.org/officeDocument/2006/relationships" id="256" r:id="R36b691d966ce4bf5"/>
-    <p:sldId xmlns:r="http://schemas.openxmlformats.org/officeDocument/2006/relationships" id="257" r:id="Re23f4476c14a43d2"/>
-    <p:sldId xmlns:r="http://schemas.openxmlformats.org/officeDocument/2006/relationships" id="258" r:id="R145297c1a3354f3a"/>
-    <p:sldId xmlns:r="http://schemas.openxmlformats.org/officeDocument/2006/relationships" id="259" r:id="R360beb19bf684271"/>
-    <p:sldId xmlns:r="http://schemas.openxmlformats.org/officeDocument/2006/relationships" id="260" r:id="R2a4075224e564f5f"/>
-    <p:sldId xmlns:r="http://schemas.openxmlformats.org/officeDocument/2006/relationships" id="261" r:id="R12fddec8f1034011"/>
-    <p:sldId xmlns:r="http://schemas.openxmlformats.org/officeDocument/2006/relationships" id="262" r:id="R08c5134257484715"/>
-    <p:sldId xmlns:r="http://schemas.openxmlformats.org/officeDocument/2006/relationships" id="263" r:id="R5bb03aefaf664dc4"/>
-    <p:sldId xmlns:r="http://schemas.openxmlformats.org/officeDocument/2006/relationships" id="264" r:id="Rb3d1c963bcac4870"/>
-    <p:sldId xmlns:r="http://schemas.openxmlformats.org/officeDocument/2006/relationships" id="265" r:id="Rb84ba7a2c31a48bf"/>
-    <p:sldId xmlns:r="http://schemas.openxmlformats.org/officeDocument/2006/relationships" id="266" r:id="R97f79cc0e5cb4b98"/>
-    <p:sldId xmlns:r="http://schemas.openxmlformats.org/officeDocument/2006/relationships" id="267" r:id="R37d558040ac044b8"/>
-    <p:sldId xmlns:r="http://schemas.openxmlformats.org/officeDocument/2006/relationships" id="268" r:id="R4274f2780c804145"/>
-    <p:sldId xmlns:r="http://schemas.openxmlformats.org/officeDocument/2006/relationships" id="269" r:id="Rb401c937228d48c1"/>
-    <p:sldId xmlns:r="http://schemas.openxmlformats.org/officeDocument/2006/relationships" id="270" r:id="R693fada3dddd47e7"/>
-    <p:sldId xmlns:r="http://schemas.openxmlformats.org/officeDocument/2006/relationships" id="271" r:id="R30385197d8674928"/>
-    <p:sldId xmlns:r="http://schemas.openxmlformats.org/officeDocument/2006/relationships" id="272" r:id="R9e111b3f233e467d"/>
-    <p:sldId xmlns:r="http://schemas.openxmlformats.org/officeDocument/2006/relationships" id="273" r:id="R3b13abec25b44c7a"/>
-    <p:sldId xmlns:r="http://schemas.openxmlformats.org/officeDocument/2006/relationships" id="274" r:id="R9417dc06b0014323"/>
-    <p:sldId xmlns:r="http://schemas.openxmlformats.org/officeDocument/2006/relationships" id="275" r:id="Rd7c62902d41643ab"/>
-    <p:sldId xmlns:r="http://schemas.openxmlformats.org/officeDocument/2006/relationships" id="276" r:id="Rd3f40a819d7c460b"/>
+    <p:sldId xmlns:r="http://schemas.openxmlformats.org/officeDocument/2006/relationships" id="256" r:id="R0a2cd4c863a5482f"/>
+    <p:sldId xmlns:r="http://schemas.openxmlformats.org/officeDocument/2006/relationships" id="257" r:id="Rfff0153c00184e37"/>
+    <p:sldId xmlns:r="http://schemas.openxmlformats.org/officeDocument/2006/relationships" id="258" r:id="R1d80200f61c741ff"/>
+    <p:sldId xmlns:r="http://schemas.openxmlformats.org/officeDocument/2006/relationships" id="259" r:id="R4427189f3c3f4823"/>
+    <p:sldId xmlns:r="http://schemas.openxmlformats.org/officeDocument/2006/relationships" id="260" r:id="R01e8405d66024c37"/>
+    <p:sldId xmlns:r="http://schemas.openxmlformats.org/officeDocument/2006/relationships" id="261" r:id="R989fccdaeed94d22"/>
+    <p:sldId xmlns:r="http://schemas.openxmlformats.org/officeDocument/2006/relationships" id="262" r:id="Refdb189e07bd4080"/>
+    <p:sldId xmlns:r="http://schemas.openxmlformats.org/officeDocument/2006/relationships" id="263" r:id="R3e8ee2349fe54758"/>
+    <p:sldId xmlns:r="http://schemas.openxmlformats.org/officeDocument/2006/relationships" id="264" r:id="R6f61625bdf534d5d"/>
+    <p:sldId xmlns:r="http://schemas.openxmlformats.org/officeDocument/2006/relationships" id="265" r:id="R2102a7e0acf849db"/>
+    <p:sldId xmlns:r="http://schemas.openxmlformats.org/officeDocument/2006/relationships" id="266" r:id="R07619b5404d44466"/>
+    <p:sldId xmlns:r="http://schemas.openxmlformats.org/officeDocument/2006/relationships" id="267" r:id="R782342ea4702461f"/>
+    <p:sldId xmlns:r="http://schemas.openxmlformats.org/officeDocument/2006/relationships" id="268" r:id="R5d7ed46d94d8433f"/>
+    <p:sldId xmlns:r="http://schemas.openxmlformats.org/officeDocument/2006/relationships" id="269" r:id="R2f48b459142848a1"/>
+    <p:sldId xmlns:r="http://schemas.openxmlformats.org/officeDocument/2006/relationships" id="270" r:id="Rf94a8d2e46d14793"/>
+    <p:sldId xmlns:r="http://schemas.openxmlformats.org/officeDocument/2006/relationships" id="271" r:id="R513a5bbfad5c445e"/>
+    <p:sldId xmlns:r="http://schemas.openxmlformats.org/officeDocument/2006/relationships" id="272" r:id="Raaa70b03362a4eaf"/>
+    <p:sldId xmlns:r="http://schemas.openxmlformats.org/officeDocument/2006/relationships" id="273" r:id="Rc9751b4db7c04205"/>
+    <p:sldId xmlns:r="http://schemas.openxmlformats.org/officeDocument/2006/relationships" id="274" r:id="Re206123bfe474582"/>
+    <p:sldId xmlns:r="http://schemas.openxmlformats.org/officeDocument/2006/relationships" id="275" r:id="Rb7f6d9172fc342b4"/>
+    <p:sldId xmlns:r="http://schemas.openxmlformats.org/officeDocument/2006/relationships" id="276" r:id="R1579826517fc4222"/>
   </p:sldIdLst>
   <p:sldSz cx="12192000" cy="6858000"/>
   <p:notesSz cx="6858000" cy="9144000"/>
-  <p:defaultTextStyle>
-    <a:defPPr xmlns:a="http://schemas.openxmlformats.org/drawingml/2006/main">
-      <a:defRPr lang="en-US"/>
-    </a:defPPr>
-    <a:lvl1pPr xmlns:a="http://schemas.openxmlformats.org/drawingml/2006/main" marL="0" indent="0" algn="l" defTabSz="914400">
-      <a:defRPr sz="1800" kern="1200">
-        <a:solidFill>
-          <a:schemeClr val="tx1"/>
-        </a:solidFill>
-        <a:latin typeface="+mn-lt"/>
-        <a:ea typeface="+mn-ea"/>
-        <a:cs typeface="+mn-cs"/>
-      </a:defRPr>
-    </a:lvl1pPr>
-    <a:lvl2pPr xmlns:a="http://schemas.openxmlformats.org/drawingml/2006/main" marL="457200" indent="0" algn="l" defTabSz="914400">
-      <a:defRPr sz="1800" kern="1200">
-        <a:solidFill>
-          <a:schemeClr val="tx1"/>
-        </a:solidFill>
-        <a:latin typeface="+mn-lt"/>
-        <a:ea typeface="+mn-ea"/>
-        <a:cs typeface="+mn-cs"/>
-      </a:defRPr>
-    </a:lvl2pPr>
-    <a:lvl3pPr xmlns:a="http://schemas.openxmlformats.org/drawingml/2006/main" marL="914400" indent="0" algn="l" defTabSz="914400">
-      <a:defRPr sz="1800" kern="1200">
-        <a:solidFill>
-          <a:schemeClr val="tx1"/>
-        </a:solidFill>
-        <a:latin typeface="+mn-lt"/>
-        <a:ea typeface="+mn-ea"/>
-        <a:cs typeface="+mn-cs"/>
-      </a:defRPr>
-    </a:lvl3pPr>
-    <a:lvl4pPr xmlns:a="http://schemas.openxmlformats.org/drawingml/2006/main" marL="1371600" indent="0" algn="l" defTabSz="914400">
-      <a:defRPr sz="1800" kern="1200">
-        <a:solidFill>
-          <a:schemeClr val="tx1"/>
-        </a:solidFill>
-        <a:latin typeface="+mn-lt"/>
-        <a:ea typeface="+mn-ea"/>
-        <a:cs typeface="+mn-cs"/>
-      </a:defRPr>
-    </a:lvl4pPr>
-    <a:lvl5pPr xmlns:a="http://schemas.openxmlformats.org/drawingml/2006/main" marL="1828800" indent="0" algn="l" defTabSz="914400">
-      <a:defRPr sz="1800" kern="1200">
-        <a:solidFill>
-          <a:schemeClr val="tx1"/>
-        </a:solidFill>
-        <a:latin typeface="+mn-lt"/>
-        <a:ea typeface="+mn-ea"/>
-        <a:cs typeface="+mn-cs"/>
-      </a:defRPr>
-    </a:lvl5pPr>
-    <a:lvl6pPr xmlns:a="http://schemas.openxmlformats.org/drawingml/2006/main" marL="2286000" indent="0" algn="l" defTabSz="914400">
-      <a:defRPr sz="1800" kern="1200">
-        <a:solidFill>
-          <a:schemeClr val="tx1"/>
-        </a:solidFill>
-        <a:latin typeface="+mn-lt"/>
-        <a:ea typeface="+mn-ea"/>
-        <a:cs typeface="+mn-cs"/>
-      </a:defRPr>
-    </a:lvl6pPr>
-    <a:lvl7pPr xmlns:a="http://schemas.openxmlformats.org/drawingml/2006/main" marL="2743200" indent="0" algn="l" defTabSz="914400">
-      <a:defRPr sz="1800" kern="1200">
-        <a:solidFill>
-          <a:schemeClr val="tx1"/>
-        </a:solidFill>
-        <a:latin typeface="+mn-lt"/>
-        <a:ea typeface="+mn-ea"/>
-        <a:cs typeface="+mn-cs"/>
-      </a:defRPr>
-    </a:lvl7pPr>
-    <a:lvl8pPr xmlns:a="http://schemas.openxmlformats.org/drawingml/2006/main" marL="3200400" indent="0" algn="l" defTabSz="914400">
-      <a:defRPr sz="1800" kern="1200">
-        <a:solidFill>
-          <a:schemeClr val="tx1"/>
-        </a:solidFill>
-        <a:latin typeface="+mn-lt"/>
-        <a:ea typeface="+mn-ea"/>
-        <a:cs typeface="+mn-cs"/>
-      </a:defRPr>
-    </a:lvl8pPr>
-    <a:lvl9pPr xmlns:a="http://schemas.openxmlformats.org/drawingml/2006/main" marL="3657600" indent="0" algn="l" defTabSz="914400">
-      <a:defRPr sz="1800" kern="1200">
-        <a:solidFill>
-          <a:schemeClr val="tx1"/>
-        </a:solidFill>
-        <a:latin typeface="+mn-lt"/>
-        <a:ea typeface="+mn-ea"/>
-        <a:cs typeface="+mn-cs"/>
-      </a:defRPr>
-    </a:lvl9pPr>
-  </p:defaultTextStyle>
 </p:presentation>
 </file>
 
@@ -1453,7 +1358,26 @@
         <p:txBody>
           <a:bodyPr xmlns:a="http://schemas.openxmlformats.org/drawingml/2006/main"/>
           <a:lstStyle xmlns:a="http://schemas.openxmlformats.org/drawingml/2006/main"/>
-          <a:p xmlns:a="http://schemas.openxmlformats.org/drawingml/2006/main"/>
+          <a:p xmlns:a="http://schemas.openxmlformats.org/drawingml/2006/main">
+            <a:r>
+              <a:t>[Sources]</a:t>
+            </a:r>
+          </a:p>
+          <a:p xmlns:a="http://schemas.openxmlformats.org/drawingml/2006/main">
+            <a:r>
+              <a:t>- RPS mata kuliah Revisi AI 2026, Program Studi S2 Statistika Terapan FMIPA Universitas Padjadjaran.</a:t>
+            </a:r>
+          </a:p>
+          <a:p xmlns:a="http://schemas.openxmlformats.org/drawingml/2006/main">
+            <a:r>
+              <a:t>[/Sources]</a:t>
+            </a:r>
+          </a:p>
+          <a:p xmlns:a="http://schemas.openxmlformats.org/drawingml/2006/main">
+            <a:r>
+              <a:t>Penutup: CPL tetap. AI adalah akselerator ketercapaian CPMK/Sub-CPMK, bukan pengganti penalaran statistika. Tekankan kewajiban prompt log ringkas, sumber, kode/notebook reproducible, validasi, dan audit trail.</a:t>
+            </a:r>
+          </a:p>
         </p:txBody>
       </p:sp>
       <p:sp>
@@ -2010,8 +1934,8 @@
   </p:cSld>
   <p:clrMap bg1="lt1" tx1="dk1" bg2="lt2" tx2="dk2" accent1="accent1" accent2="accent2" accent3="accent3" accent4="accent4" accent5="accent5" accent6="accent6" hlink="hlink" folHlink="folHlink"/>
   <p:sldLayoutIdLst>
-    <p:sldLayoutId xmlns:r="http://schemas.openxmlformats.org/officeDocument/2006/relationships" id="2147483649" r:id="Rf37ba9f8a5864b01"/>
-    <p:sldLayoutId xmlns:r="http://schemas.openxmlformats.org/officeDocument/2006/relationships" id="2147483650" r:id="R20bd40922a51418f"/>
+    <p:sldLayoutId xmlns:r="http://schemas.openxmlformats.org/officeDocument/2006/relationships" id="2147483649" r:id="Rd5899fb3a2e44ae8"/>
+    <p:sldLayoutId xmlns:r="http://schemas.openxmlformats.org/officeDocument/2006/relationships" id="2147483650" r:id="R0940374aacc54097"/>
   </p:sldLayoutIdLst>
   <p:hf sldNum="0" hdr="0" ftr="0" dt="0"/>
   <p:txStyles>
@@ -2577,7 +2501,7 @@
           <p:nvPr/>
         </p:nvPicPr>
         <p:blipFill>
-          <a:blip xmlns:r="http://schemas.openxmlformats.org/officeDocument/2006/relationships" xmlns:a="http://schemas.openxmlformats.org/drawingml/2006/main" r:embed="R776e2308c68b4239"/>
+          <a:blip xmlns:r="http://schemas.openxmlformats.org/officeDocument/2006/relationships" xmlns:a="http://schemas.openxmlformats.org/drawingml/2006/main" r:embed="R4732f1ea87d04a2b"/>
           <a:stretch xmlns:a="http://schemas.openxmlformats.org/drawingml/2006/main">
             <a:fillRect l="0" t="0" r="0" b="0"/>
           </a:stretch>
@@ -2723,7 +2647,7 @@
           <p:nvPr/>
         </p:nvPicPr>
         <p:blipFill>
-          <a:blip xmlns:r="http://schemas.openxmlformats.org/officeDocument/2006/relationships" xmlns:a="http://schemas.openxmlformats.org/drawingml/2006/main" r:embed="R9bbe28af3726479a"/>
+          <a:blip xmlns:r="http://schemas.openxmlformats.org/officeDocument/2006/relationships" xmlns:a="http://schemas.openxmlformats.org/drawingml/2006/main" r:embed="R5f4dd5bedba34619"/>
           <a:stretch xmlns:a="http://schemas.openxmlformats.org/drawingml/2006/main">
             <a:fillRect l="0" t="0" r="0" b="0"/>
           </a:stretch>
@@ -3329,7 +3253,7 @@
           <p:nvPr/>
         </p:nvPicPr>
         <p:blipFill>
-          <a:blip xmlns:r="http://schemas.openxmlformats.org/officeDocument/2006/relationships" xmlns:a="http://schemas.openxmlformats.org/drawingml/2006/main" r:embed="R48446293df4d4053"/>
+          <a:blip xmlns:r="http://schemas.openxmlformats.org/officeDocument/2006/relationships" xmlns:a="http://schemas.openxmlformats.org/drawingml/2006/main" r:embed="R350a37fbf3e645e6"/>
           <a:stretch xmlns:a="http://schemas.openxmlformats.org/drawingml/2006/main">
             <a:fillRect l="0" t="0" r="0" b="0"/>
           </a:stretch>
@@ -5479,7 +5403,7 @@
           <p:nvPr/>
         </p:nvPicPr>
         <p:blipFill>
-          <a:blip xmlns:r="http://schemas.openxmlformats.org/officeDocument/2006/relationships" xmlns:a="http://schemas.openxmlformats.org/drawingml/2006/main" r:embed="R04aa107aba0340e4"/>
+          <a:blip xmlns:r="http://schemas.openxmlformats.org/officeDocument/2006/relationships" xmlns:a="http://schemas.openxmlformats.org/drawingml/2006/main" r:embed="Reb5e129edaa54e6e"/>
           <a:stretch xmlns:a="http://schemas.openxmlformats.org/drawingml/2006/main">
             <a:fillRect l="0" t="0" r="0" b="0"/>
           </a:stretch>
@@ -5758,7 +5682,7 @@
           <p:nvPr/>
         </p:nvPicPr>
         <p:blipFill>
-          <a:blip xmlns:r="http://schemas.openxmlformats.org/officeDocument/2006/relationships" xmlns:a="http://schemas.openxmlformats.org/drawingml/2006/main" r:embed="R47a651a36a0f4b6c"/>
+          <a:blip xmlns:r="http://schemas.openxmlformats.org/officeDocument/2006/relationships" xmlns:a="http://schemas.openxmlformats.org/drawingml/2006/main" r:embed="R3d9e936439514768"/>
           <a:stretch xmlns:a="http://schemas.openxmlformats.org/drawingml/2006/main">
             <a:fillRect l="0" t="0" r="0" b="0"/>
           </a:stretch>
@@ -7292,7 +7216,7 @@
           <p:nvPr/>
         </p:nvPicPr>
         <p:blipFill>
-          <a:blip xmlns:r="http://schemas.openxmlformats.org/officeDocument/2006/relationships" xmlns:a="http://schemas.openxmlformats.org/drawingml/2006/main" r:embed="R6a8592ace8764385"/>
+          <a:blip xmlns:r="http://schemas.openxmlformats.org/officeDocument/2006/relationships" xmlns:a="http://schemas.openxmlformats.org/drawingml/2006/main" r:embed="Rfd0b325f770a486f"/>
           <a:stretch xmlns:a="http://schemas.openxmlformats.org/drawingml/2006/main">
             <a:fillRect l="0" t="0" r="0" b="0"/>
           </a:stretch>
@@ -8461,7 +8385,7 @@
           <p:nvPr/>
         </p:nvPicPr>
         <p:blipFill>
-          <a:blip xmlns:r="http://schemas.openxmlformats.org/officeDocument/2006/relationships" xmlns:a="http://schemas.openxmlformats.org/drawingml/2006/main" r:embed="R880718c476d644cd"/>
+          <a:blip xmlns:r="http://schemas.openxmlformats.org/officeDocument/2006/relationships" xmlns:a="http://schemas.openxmlformats.org/drawingml/2006/main" r:embed="R8d34da49416745d0"/>
           <a:stretch xmlns:a="http://schemas.openxmlformats.org/drawingml/2006/main">
             <a:fillRect l="0" t="0" r="0" b="0"/>
           </a:stretch>
@@ -9688,7 +9612,7 @@
           <p:nvPr/>
         </p:nvPicPr>
         <p:blipFill>
-          <a:blip xmlns:r="http://schemas.openxmlformats.org/officeDocument/2006/relationships" xmlns:a="http://schemas.openxmlformats.org/drawingml/2006/main" r:embed="R919a366766084001"/>
+          <a:blip xmlns:r="http://schemas.openxmlformats.org/officeDocument/2006/relationships" xmlns:a="http://schemas.openxmlformats.org/drawingml/2006/main" r:embed="R8c0d9f7f45004318"/>
           <a:stretch xmlns:a="http://schemas.openxmlformats.org/drawingml/2006/main">
             <a:fillRect l="0" t="0" r="0" b="0"/>
           </a:stretch>
@@ -10893,7 +10817,7 @@
           <p:nvPr/>
         </p:nvPicPr>
         <p:blipFill>
-          <a:blip xmlns:r="http://schemas.openxmlformats.org/officeDocument/2006/relationships" xmlns:a="http://schemas.openxmlformats.org/drawingml/2006/main" r:embed="Rcbc356492f4b4757"/>
+          <a:blip xmlns:r="http://schemas.openxmlformats.org/officeDocument/2006/relationships" xmlns:a="http://schemas.openxmlformats.org/drawingml/2006/main" r:embed="Rd376e42a15e04e13"/>
           <a:stretch xmlns:a="http://schemas.openxmlformats.org/drawingml/2006/main">
             <a:fillRect l="0" t="0" r="0" b="0"/>
           </a:stretch>
@@ -11172,7 +11096,7 @@
           <p:nvPr/>
         </p:nvPicPr>
         <p:blipFill>
-          <a:blip xmlns:r="http://schemas.openxmlformats.org/officeDocument/2006/relationships" xmlns:a="http://schemas.openxmlformats.org/drawingml/2006/main" r:embed="Rd18bd1627e874d43"/>
+          <a:blip xmlns:r="http://schemas.openxmlformats.org/officeDocument/2006/relationships" xmlns:a="http://schemas.openxmlformats.org/drawingml/2006/main" r:embed="R76e17501ebe9468e"/>
           <a:stretch xmlns:a="http://schemas.openxmlformats.org/drawingml/2006/main">
             <a:fillRect l="0" t="0" r="0" b="0"/>
           </a:stretch>
@@ -12717,7 +12641,7 @@
           <p:nvPr/>
         </p:nvPicPr>
         <p:blipFill>
-          <a:blip xmlns:r="http://schemas.openxmlformats.org/officeDocument/2006/relationships" xmlns:a="http://schemas.openxmlformats.org/drawingml/2006/main" r:embed="Rbddca698e13844a1"/>
+          <a:blip xmlns:r="http://schemas.openxmlformats.org/officeDocument/2006/relationships" xmlns:a="http://schemas.openxmlformats.org/drawingml/2006/main" r:embed="R9667ed547c30429e"/>
           <a:stretch xmlns:a="http://schemas.openxmlformats.org/drawingml/2006/main">
             <a:fillRect l="0" t="0" r="0" b="0"/>
           </a:stretch>
@@ -14734,7 +14658,7 @@
           <p:nvPr/>
         </p:nvPicPr>
         <p:blipFill>
-          <a:blip xmlns:r="http://schemas.openxmlformats.org/officeDocument/2006/relationships" xmlns:a="http://schemas.openxmlformats.org/drawingml/2006/main" r:embed="Rfbf19be5167c4ed0"/>
+          <a:blip xmlns:r="http://schemas.openxmlformats.org/officeDocument/2006/relationships" xmlns:a="http://schemas.openxmlformats.org/drawingml/2006/main" r:embed="Rac35865908ef4ad8"/>
           <a:stretch xmlns:a="http://schemas.openxmlformats.org/drawingml/2006/main">
             <a:fillRect l="0" t="0" r="0" b="0"/>
           </a:stretch>
@@ -15961,7 +15885,7 @@
           <p:nvPr/>
         </p:nvPicPr>
         <p:blipFill>
-          <a:blip xmlns:r="http://schemas.openxmlformats.org/officeDocument/2006/relationships" xmlns:a="http://schemas.openxmlformats.org/drawingml/2006/main" r:embed="R4fe708527cf24b9a"/>
+          <a:blip xmlns:r="http://schemas.openxmlformats.org/officeDocument/2006/relationships" xmlns:a="http://schemas.openxmlformats.org/drawingml/2006/main" r:embed="Rba0e4980e00d4dbc"/>
           <a:stretch xmlns:a="http://schemas.openxmlformats.org/drawingml/2006/main">
             <a:fillRect l="0" t="0" r="0" b="0"/>
           </a:stretch>
@@ -17102,7 +17026,7 @@
           <p:nvPr/>
         </p:nvPicPr>
         <p:blipFill>
-          <a:blip xmlns:r="http://schemas.openxmlformats.org/officeDocument/2006/relationships" xmlns:a="http://schemas.openxmlformats.org/drawingml/2006/main" r:embed="Ra90182be6b01473d"/>
+          <a:blip xmlns:r="http://schemas.openxmlformats.org/officeDocument/2006/relationships" xmlns:a="http://schemas.openxmlformats.org/drawingml/2006/main" r:embed="R9befcaee90b64fd0"/>
           <a:stretch xmlns:a="http://schemas.openxmlformats.org/drawingml/2006/main">
             <a:fillRect l="0" t="0" r="0" b="0"/>
           </a:stretch>
@@ -18567,7 +18491,7 @@
           <p:nvPr/>
         </p:nvPicPr>
         <p:blipFill>
-          <a:blip xmlns:r="http://schemas.openxmlformats.org/officeDocument/2006/relationships" xmlns:a="http://schemas.openxmlformats.org/drawingml/2006/main" r:embed="R482c3338ea8b419a"/>
+          <a:blip xmlns:r="http://schemas.openxmlformats.org/officeDocument/2006/relationships" xmlns:a="http://schemas.openxmlformats.org/drawingml/2006/main" r:embed="Rced9aa8c5d704328"/>
           <a:stretch xmlns:a="http://schemas.openxmlformats.org/drawingml/2006/main">
             <a:fillRect l="0" t="0" r="0" b="0"/>
           </a:stretch>
@@ -18713,7 +18637,7 @@
           <p:nvPr/>
         </p:nvPicPr>
         <p:blipFill>
-          <a:blip xmlns:r="http://schemas.openxmlformats.org/officeDocument/2006/relationships" xmlns:a="http://schemas.openxmlformats.org/drawingml/2006/main" r:embed="R5212baf368b34d5d"/>
+          <a:blip xmlns:r="http://schemas.openxmlformats.org/officeDocument/2006/relationships" xmlns:a="http://schemas.openxmlformats.org/drawingml/2006/main" r:embed="Rcf14b5f7b9704853"/>
           <a:stretch xmlns:a="http://schemas.openxmlformats.org/drawingml/2006/main">
             <a:fillRect l="0" t="0" r="0" b="0"/>
           </a:stretch>
@@ -18817,7 +18741,7 @@
                 <a:ea typeface="Aptos Display"/>
                 <a:cs typeface="Aptos Display"/>
               </a:rPr>
-              <a:t>Dari data menuju</a:t>
+              <a:t>AI mempercepat proses,</a:t>
             </a:r>
           </a:p>
           <a:p xmlns:a="http://schemas.openxmlformats.org/drawingml/2006/main">
@@ -18833,7 +18757,7 @@
                 <a:ea typeface="Aptos Display"/>
                 <a:cs typeface="Aptos Display"/>
               </a:rPr>
-              <a:t>keputusan yang dapat diuji</a:t>
+              <a:t>penalaran tetap memimpin</a:t>
             </a:r>
           </a:p>
         </p:txBody>
@@ -18900,7 +18824,7 @@
         </p:spPr>
         <p:txBody>
           <a:bodyPr xmlns:a="http://schemas.openxmlformats.org/drawingml/2006/main" wrap="square" lIns="635" tIns="635" rIns="635" bIns="635" anchor="t">
-            <a:normAutofit fontScale="100000"/>
+            <a:normAutofit fontScale="93620"/>
           </a:bodyPr>
           <a:lstStyle xmlns:a="http://schemas.openxmlformats.org/drawingml/2006/main"/>
           <a:p xmlns:a="http://schemas.openxmlformats.org/drawingml/2006/main">
@@ -18916,7 +18840,7 @@
                 <a:ea typeface="Aptos"/>
                 <a:cs typeface="Aptos"/>
               </a:rPr>
-              <a:t>Teori Antrian menghubungkan teori, data, metode, validasi, dan komunikasi untuk menghasilkan keputusan yang sahih, dapat direplikasi, dan bertanggung jawab.</a:t>
+              <a:t>Teori Antrian memadukan teori, data, komputasi, validasi, dan komunikasi. AI mempercepat eksplorasi dan pemeriksaan awal; mahasiswa tetap memverifikasi asumsi, kode, hasil numerik, ketidakpastian, sumber, dan dampak sebelum mengambil keputusan.</a:t>
             </a:r>
           </a:p>
         </p:txBody>
@@ -19086,7 +19010,7 @@
           <p:nvPr/>
         </p:nvPicPr>
         <p:blipFill>
-          <a:blip xmlns:r="http://schemas.openxmlformats.org/officeDocument/2006/relationships" xmlns:a="http://schemas.openxmlformats.org/drawingml/2006/main" r:embed="R677e6f5e56a34341"/>
+          <a:blip xmlns:r="http://schemas.openxmlformats.org/officeDocument/2006/relationships" xmlns:a="http://schemas.openxmlformats.org/drawingml/2006/main" r:embed="Rb7fc3dde2c464932"/>
           <a:stretch xmlns:a="http://schemas.openxmlformats.org/drawingml/2006/main">
             <a:fillRect l="0" t="0" r="0" b="0"/>
           </a:stretch>
@@ -20217,7 +20141,7 @@
           <p:nvPr/>
         </p:nvPicPr>
         <p:blipFill>
-          <a:blip xmlns:r="http://schemas.openxmlformats.org/officeDocument/2006/relationships" xmlns:a="http://schemas.openxmlformats.org/drawingml/2006/main" r:embed="R52494159cc5e4314"/>
+          <a:blip xmlns:r="http://schemas.openxmlformats.org/officeDocument/2006/relationships" xmlns:a="http://schemas.openxmlformats.org/drawingml/2006/main" r:embed="Rc2fd8aec550d406f"/>
           <a:stretch xmlns:a="http://schemas.openxmlformats.org/drawingml/2006/main">
             <a:fillRect l="0" t="0" r="0" b="0"/>
           </a:stretch>
@@ -22321,7 +22245,7 @@
           <p:nvPr/>
         </p:nvPicPr>
         <p:blipFill>
-          <a:blip xmlns:r="http://schemas.openxmlformats.org/officeDocument/2006/relationships" xmlns:a="http://schemas.openxmlformats.org/drawingml/2006/main" r:embed="R7feecdb010a8496a"/>
+          <a:blip xmlns:r="http://schemas.openxmlformats.org/officeDocument/2006/relationships" xmlns:a="http://schemas.openxmlformats.org/drawingml/2006/main" r:embed="Rdd14d61bb6984804"/>
           <a:stretch xmlns:a="http://schemas.openxmlformats.org/drawingml/2006/main">
             <a:fillRect l="0" t="0" r="0" b="0"/>
           </a:stretch>
@@ -23603,7 +23527,7 @@
           <p:nvPr/>
         </p:nvPicPr>
         <p:blipFill>
-          <a:blip xmlns:r="http://schemas.openxmlformats.org/officeDocument/2006/relationships" xmlns:a="http://schemas.openxmlformats.org/drawingml/2006/main" r:embed="R1dc06c1e48c04ba5"/>
+          <a:blip xmlns:r="http://schemas.openxmlformats.org/officeDocument/2006/relationships" xmlns:a="http://schemas.openxmlformats.org/drawingml/2006/main" r:embed="R466379be7edc4555"/>
           <a:stretch xmlns:a="http://schemas.openxmlformats.org/drawingml/2006/main">
             <a:fillRect l="0" t="0" r="0" b="0"/>
           </a:stretch>
@@ -23882,7 +23806,7 @@
           <p:nvPr/>
         </p:nvPicPr>
         <p:blipFill>
-          <a:blip xmlns:r="http://schemas.openxmlformats.org/officeDocument/2006/relationships" xmlns:a="http://schemas.openxmlformats.org/drawingml/2006/main" r:embed="R100da740d93d4b90"/>
+          <a:blip xmlns:r="http://schemas.openxmlformats.org/officeDocument/2006/relationships" xmlns:a="http://schemas.openxmlformats.org/drawingml/2006/main" r:embed="R36ceab9fcdf14d97"/>
           <a:stretch xmlns:a="http://schemas.openxmlformats.org/drawingml/2006/main">
             <a:fillRect l="0" t="0" r="0" b="0"/>
           </a:stretch>
@@ -25962,7 +25886,7 @@
           <p:nvPr/>
         </p:nvPicPr>
         <p:blipFill>
-          <a:blip xmlns:r="http://schemas.openxmlformats.org/officeDocument/2006/relationships" xmlns:a="http://schemas.openxmlformats.org/drawingml/2006/main" r:embed="R079bf093177d4c4c"/>
+          <a:blip xmlns:r="http://schemas.openxmlformats.org/officeDocument/2006/relationships" xmlns:a="http://schemas.openxmlformats.org/drawingml/2006/main" r:embed="Rd10c0be793c846de"/>
           <a:stretch xmlns:a="http://schemas.openxmlformats.org/drawingml/2006/main">
             <a:fillRect l="0" t="0" r="0" b="0"/>
           </a:stretch>
@@ -27375,7 +27299,7 @@
           <p:nvPr/>
         </p:nvPicPr>
         <p:blipFill>
-          <a:blip xmlns:r="http://schemas.openxmlformats.org/officeDocument/2006/relationships" xmlns:a="http://schemas.openxmlformats.org/drawingml/2006/main" r:embed="R27c7e93bd9134591"/>
+          <a:blip xmlns:r="http://schemas.openxmlformats.org/officeDocument/2006/relationships" xmlns:a="http://schemas.openxmlformats.org/drawingml/2006/main" r:embed="Rf979c306c21b4795"/>
           <a:stretch xmlns:a="http://schemas.openxmlformats.org/drawingml/2006/main">
             <a:fillRect l="0" t="0" r="0" b="0"/>
           </a:stretch>
